--- a/public/downloads/praesentation/M05.pptx
+++ b/public/downloads/praesentation/M05.pptx
@@ -9794,7 +9794,7 @@
                   </a:txBody>
                   <a:tcPr>
                     <a:solidFill>
-                      <a:srgbClr val="191D2E"/>
+                      <a:srgbClr val="1F2B56"/>
                     </a:solidFill>
                   </a:tcPr>
                 </a:tc>
@@ -9816,7 +9816,7 @@
                   </a:txBody>
                   <a:tcPr>
                     <a:solidFill>
-                      <a:srgbClr val="191D2E"/>
+                      <a:srgbClr val="1F2B56"/>
                     </a:solidFill>
                   </a:tcPr>
                 </a:tc>
@@ -9838,7 +9838,7 @@
                   </a:txBody>
                   <a:tcPr>
                     <a:solidFill>
-                      <a:srgbClr val="191D2E"/>
+                      <a:srgbClr val="1F2B56"/>
                     </a:solidFill>
                   </a:tcPr>
                 </a:tc>
@@ -12308,29 +12308,29 @@
         </p:nvSpPr>
         <p:spPr>
           <a:xfrm>
-            <a:off x="4064000" y="927100"/>
-            <a:ext cx="508000" cy="647700"/>
-          </a:xfrm>
-          <a:prstGeom prst="rect">
-            <a:avLst/>
-          </a:prstGeom>
-          <a:noFill/>
-        </p:spPr>
-        <p:txBody>
-          <a:bodyPr wrap="square">
+            <a:off x="4064000" y="939799"/>
+            <a:ext cx="762000" cy="647700"/>
+          </a:xfrm>
+          <a:prstGeom prst="rect">
+            <a:avLst/>
+          </a:prstGeom>
+          <a:noFill/>
+        </p:spPr>
+        <p:txBody>
+          <a:bodyPr wrap="none">
             <a:normAutofit/>
           </a:bodyPr>
           <a:lstStyle/>
           <a:p>
             <a:pPr algn="l"/>
             <a:r>
-              <a:rPr sz="2600" b="0" i="1">
+              <a:rPr sz="2400" b="0" i="1">
                 <a:solidFill>
                   <a:srgbClr val="1F2B56"/>
                 </a:solidFill>
                 <a:latin typeface="Georgia"/>
               </a:rPr>
-              <a:t>I.</a:t>
+              <a:t>I</a:t>
             </a:r>
           </a:p>
         </p:txBody>
@@ -12343,8 +12343,8 @@
         </p:nvSpPr>
         <p:spPr>
           <a:xfrm>
-            <a:off x="4699000" y="952500"/>
-            <a:ext cx="6858000" cy="622300"/>
+            <a:off x="4953000" y="952500"/>
+            <a:ext cx="6629400" cy="635000"/>
           </a:xfrm>
           <a:prstGeom prst="rect">
             <a:avLst/>
@@ -12378,7 +12378,7 @@
         </p:nvSpPr>
         <p:spPr>
           <a:xfrm>
-            <a:off x="4064000" y="1574800"/>
+            <a:off x="4064000" y="1587500"/>
             <a:ext cx="7518399" cy="6350"/>
           </a:xfrm>
           <a:prstGeom prst="rect">
@@ -12421,29 +12421,29 @@
         </p:nvSpPr>
         <p:spPr>
           <a:xfrm>
-            <a:off x="4064000" y="1612900"/>
-            <a:ext cx="508000" cy="647700"/>
-          </a:xfrm>
-          <a:prstGeom prst="rect">
-            <a:avLst/>
-          </a:prstGeom>
-          <a:noFill/>
-        </p:spPr>
-        <p:txBody>
-          <a:bodyPr wrap="square">
+            <a:off x="4064000" y="1638300"/>
+            <a:ext cx="762000" cy="647700"/>
+          </a:xfrm>
+          <a:prstGeom prst="rect">
+            <a:avLst/>
+          </a:prstGeom>
+          <a:noFill/>
+        </p:spPr>
+        <p:txBody>
+          <a:bodyPr wrap="none">
             <a:normAutofit/>
           </a:bodyPr>
           <a:lstStyle/>
           <a:p>
             <a:pPr algn="l"/>
             <a:r>
-              <a:rPr sz="2600" b="0" i="1">
+              <a:rPr sz="2400" b="0" i="1">
                 <a:solidFill>
                   <a:srgbClr val="1F2B56"/>
                 </a:solidFill>
                 <a:latin typeface="Georgia"/>
               </a:rPr>
-              <a:t>II.</a:t>
+              <a:t>II</a:t>
             </a:r>
           </a:p>
         </p:txBody>
@@ -12456,8 +12456,8 @@
         </p:nvSpPr>
         <p:spPr>
           <a:xfrm>
-            <a:off x="4699000" y="1638300"/>
-            <a:ext cx="6858000" cy="622300"/>
+            <a:off x="4953000" y="1651000"/>
+            <a:ext cx="6629400" cy="635000"/>
           </a:xfrm>
           <a:prstGeom prst="rect">
             <a:avLst/>
@@ -12491,7 +12491,7 @@
         </p:nvSpPr>
         <p:spPr>
           <a:xfrm>
-            <a:off x="4064000" y="2260600"/>
+            <a:off x="4064000" y="2286000"/>
             <a:ext cx="7518399" cy="6350"/>
           </a:xfrm>
           <a:prstGeom prst="rect">
@@ -12534,29 +12534,29 @@
         </p:nvSpPr>
         <p:spPr>
           <a:xfrm>
-            <a:off x="4064000" y="2298700"/>
-            <a:ext cx="508000" cy="647700"/>
-          </a:xfrm>
-          <a:prstGeom prst="rect">
-            <a:avLst/>
-          </a:prstGeom>
-          <a:noFill/>
-        </p:spPr>
-        <p:txBody>
-          <a:bodyPr wrap="square">
+            <a:off x="4064000" y="2336800"/>
+            <a:ext cx="762000" cy="647700"/>
+          </a:xfrm>
+          <a:prstGeom prst="rect">
+            <a:avLst/>
+          </a:prstGeom>
+          <a:noFill/>
+        </p:spPr>
+        <p:txBody>
+          <a:bodyPr wrap="none">
             <a:normAutofit/>
           </a:bodyPr>
           <a:lstStyle/>
           <a:p>
             <a:pPr algn="l"/>
             <a:r>
-              <a:rPr sz="2600" b="0" i="1">
+              <a:rPr sz="2400" b="0" i="1">
                 <a:solidFill>
                   <a:srgbClr val="1F2B56"/>
                 </a:solidFill>
                 <a:latin typeface="Georgia"/>
               </a:rPr>
-              <a:t>III.</a:t>
+              <a:t>III</a:t>
             </a:r>
           </a:p>
         </p:txBody>
@@ -12569,8 +12569,8 @@
         </p:nvSpPr>
         <p:spPr>
           <a:xfrm>
-            <a:off x="4699000" y="2324100"/>
-            <a:ext cx="6858000" cy="622300"/>
+            <a:off x="4953000" y="2349500"/>
+            <a:ext cx="6629400" cy="635000"/>
           </a:xfrm>
           <a:prstGeom prst="rect">
             <a:avLst/>
@@ -12604,7 +12604,7 @@
         </p:nvSpPr>
         <p:spPr>
           <a:xfrm>
-            <a:off x="4064000" y="2946400"/>
+            <a:off x="4064000" y="2984500"/>
             <a:ext cx="7518399" cy="6350"/>
           </a:xfrm>
           <a:prstGeom prst="rect">
@@ -12647,29 +12647,29 @@
         </p:nvSpPr>
         <p:spPr>
           <a:xfrm>
-            <a:off x="4064000" y="2984500"/>
-            <a:ext cx="508000" cy="647700"/>
-          </a:xfrm>
-          <a:prstGeom prst="rect">
-            <a:avLst/>
-          </a:prstGeom>
-          <a:noFill/>
-        </p:spPr>
-        <p:txBody>
-          <a:bodyPr wrap="square">
+            <a:off x="4064000" y="3035300"/>
+            <a:ext cx="762000" cy="647700"/>
+          </a:xfrm>
+          <a:prstGeom prst="rect">
+            <a:avLst/>
+          </a:prstGeom>
+          <a:noFill/>
+        </p:spPr>
+        <p:txBody>
+          <a:bodyPr wrap="none">
             <a:normAutofit/>
           </a:bodyPr>
           <a:lstStyle/>
           <a:p>
             <a:pPr algn="l"/>
             <a:r>
-              <a:rPr sz="2600" b="0" i="1">
+              <a:rPr sz="2400" b="0" i="1">
                 <a:solidFill>
                   <a:srgbClr val="1F2B56"/>
                 </a:solidFill>
                 <a:latin typeface="Georgia"/>
               </a:rPr>
-              <a:t>IV.</a:t>
+              <a:t>IV</a:t>
             </a:r>
           </a:p>
         </p:txBody>
@@ -12682,8 +12682,8 @@
         </p:nvSpPr>
         <p:spPr>
           <a:xfrm>
-            <a:off x="4699000" y="3009900"/>
-            <a:ext cx="6858000" cy="622300"/>
+            <a:off x="4953000" y="3048000"/>
+            <a:ext cx="6629400" cy="635000"/>
           </a:xfrm>
           <a:prstGeom prst="rect">
             <a:avLst/>
@@ -14404,7 +14404,7 @@
                   </a:txBody>
                   <a:tcPr>
                     <a:solidFill>
-                      <a:srgbClr val="191D2E"/>
+                      <a:srgbClr val="1F2B56"/>
                     </a:solidFill>
                   </a:tcPr>
                 </a:tc>
@@ -14426,7 +14426,7 @@
                   </a:txBody>
                   <a:tcPr>
                     <a:solidFill>
-                      <a:srgbClr val="191D2E"/>
+                      <a:srgbClr val="1F2B56"/>
                     </a:solidFill>
                   </a:tcPr>
                 </a:tc>
@@ -14448,7 +14448,7 @@
                   </a:txBody>
                   <a:tcPr>
                     <a:solidFill>
-                      <a:srgbClr val="191D2E"/>
+                      <a:srgbClr val="1F2B56"/>
                     </a:solidFill>
                   </a:tcPr>
                 </a:tc>
@@ -14470,7 +14470,7 @@
                   </a:txBody>
                   <a:tcPr>
                     <a:solidFill>
-                      <a:srgbClr val="191D2E"/>
+                      <a:srgbClr val="1F2B56"/>
                     </a:solidFill>
                   </a:tcPr>
                 </a:tc>
@@ -21579,7 +21579,7 @@
                   </a:txBody>
                   <a:tcPr>
                     <a:solidFill>
-                      <a:srgbClr val="191D2E"/>
+                      <a:srgbClr val="1F2B56"/>
                     </a:solidFill>
                   </a:tcPr>
                 </a:tc>
@@ -21601,7 +21601,7 @@
                   </a:txBody>
                   <a:tcPr>
                     <a:solidFill>
-                      <a:srgbClr val="191D2E"/>
+                      <a:srgbClr val="1F2B56"/>
                     </a:solidFill>
                   </a:tcPr>
                 </a:tc>
@@ -21623,7 +21623,7 @@
                   </a:txBody>
                   <a:tcPr>
                     <a:solidFill>
-                      <a:srgbClr val="191D2E"/>
+                      <a:srgbClr val="1F2B56"/>
                     </a:solidFill>
                   </a:tcPr>
                 </a:tc>
@@ -21645,7 +21645,7 @@
                   </a:txBody>
                   <a:tcPr>
                     <a:solidFill>
-                      <a:srgbClr val="191D2E"/>
+                      <a:srgbClr val="1F2B56"/>
                     </a:solidFill>
                   </a:tcPr>
                 </a:tc>
@@ -23828,7 +23828,7 @@
     <p:bg>
       <p:bgPr>
         <a:solidFill>
-          <a:srgbClr val="191D2E"/>
+          <a:srgbClr val="1F2B56"/>
         </a:solidFill>
         <a:effectLst/>
       </p:bgPr>
@@ -25811,7 +25811,7 @@
     <p:bg>
       <p:bgPr>
         <a:solidFill>
-          <a:srgbClr val="191D2E"/>
+          <a:srgbClr val="1F2B56"/>
         </a:solidFill>
         <a:effectLst/>
       </p:bgPr>
@@ -26977,7 +26977,7 @@
     <p:bg>
       <p:bgPr>
         <a:solidFill>
-          <a:srgbClr val="191D2E"/>
+          <a:srgbClr val="1F2B56"/>
         </a:solidFill>
         <a:effectLst/>
       </p:bgPr>
